--- a/intel_IP/LGSM/doc/LGSM BW.pptx
+++ b/intel_IP/LGSM/doc/LGSM BW.pptx
@@ -7,6 +7,7 @@
   <p:sldIdLst>
     <p:sldId id="256" r:id="rId2"/>
     <p:sldId id="257" r:id="rId3"/>
+    <p:sldId id="258" r:id="rId4"/>
   </p:sldIdLst>
   <p:sldSz cx="12192000" cy="6858000"/>
   <p:notesSz cx="6858000" cy="9144000"/>
@@ -105,6 +106,11 @@
       </a:defRPr>
     </a:lvl9pPr>
   </p:defaultTextStyle>
+  <p:extLst>
+    <p:ext uri="{EFAFB233-063F-42B5-8137-9DF3F51BA10A}">
+      <p15:sldGuideLst xmlns:p15="http://schemas.microsoft.com/office/powerpoint/2012/main"/>
+    </p:ext>
+  </p:extLst>
 </p:presentation>
 </file>
 
@@ -255,7 +261,7 @@
           <a:p>
             <a:fld id="{C97265F6-423D-4142-A604-D1F95CB3D941}" type="datetimeFigureOut">
               <a:rPr lang="zh-TW" altLang="en-US" smtClean="0"/>
-              <a:t>2026/3/15</a:t>
+              <a:t>2026/3/16</a:t>
             </a:fld>
             <a:endParaRPr lang="zh-TW" altLang="en-US"/>
           </a:p>
@@ -453,7 +459,7 @@
           <a:p>
             <a:fld id="{C97265F6-423D-4142-A604-D1F95CB3D941}" type="datetimeFigureOut">
               <a:rPr lang="zh-TW" altLang="en-US" smtClean="0"/>
-              <a:t>2026/3/15</a:t>
+              <a:t>2026/3/16</a:t>
             </a:fld>
             <a:endParaRPr lang="zh-TW" altLang="en-US"/>
           </a:p>
@@ -661,7 +667,7 @@
           <a:p>
             <a:fld id="{C97265F6-423D-4142-A604-D1F95CB3D941}" type="datetimeFigureOut">
               <a:rPr lang="zh-TW" altLang="en-US" smtClean="0"/>
-              <a:t>2026/3/15</a:t>
+              <a:t>2026/3/16</a:t>
             </a:fld>
             <a:endParaRPr lang="zh-TW" altLang="en-US"/>
           </a:p>
@@ -859,7 +865,7 @@
           <a:p>
             <a:fld id="{C97265F6-423D-4142-A604-D1F95CB3D941}" type="datetimeFigureOut">
               <a:rPr lang="zh-TW" altLang="en-US" smtClean="0"/>
-              <a:t>2026/3/15</a:t>
+              <a:t>2026/3/16</a:t>
             </a:fld>
             <a:endParaRPr lang="zh-TW" altLang="en-US"/>
           </a:p>
@@ -1134,7 +1140,7 @@
           <a:p>
             <a:fld id="{C97265F6-423D-4142-A604-D1F95CB3D941}" type="datetimeFigureOut">
               <a:rPr lang="zh-TW" altLang="en-US" smtClean="0"/>
-              <a:t>2026/3/15</a:t>
+              <a:t>2026/3/16</a:t>
             </a:fld>
             <a:endParaRPr lang="zh-TW" altLang="en-US"/>
           </a:p>
@@ -1399,7 +1405,7 @@
           <a:p>
             <a:fld id="{C97265F6-423D-4142-A604-D1F95CB3D941}" type="datetimeFigureOut">
               <a:rPr lang="zh-TW" altLang="en-US" smtClean="0"/>
-              <a:t>2026/3/15</a:t>
+              <a:t>2026/3/16</a:t>
             </a:fld>
             <a:endParaRPr lang="zh-TW" altLang="en-US"/>
           </a:p>
@@ -1811,7 +1817,7 @@
           <a:p>
             <a:fld id="{C97265F6-423D-4142-A604-D1F95CB3D941}" type="datetimeFigureOut">
               <a:rPr lang="zh-TW" altLang="en-US" smtClean="0"/>
-              <a:t>2026/3/15</a:t>
+              <a:t>2026/3/16</a:t>
             </a:fld>
             <a:endParaRPr lang="zh-TW" altLang="en-US"/>
           </a:p>
@@ -1952,7 +1958,7 @@
           <a:p>
             <a:fld id="{C97265F6-423D-4142-A604-D1F95CB3D941}" type="datetimeFigureOut">
               <a:rPr lang="zh-TW" altLang="en-US" smtClean="0"/>
-              <a:t>2026/3/15</a:t>
+              <a:t>2026/3/16</a:t>
             </a:fld>
             <a:endParaRPr lang="zh-TW" altLang="en-US"/>
           </a:p>
@@ -2065,7 +2071,7 @@
           <a:p>
             <a:fld id="{C97265F6-423D-4142-A604-D1F95CB3D941}" type="datetimeFigureOut">
               <a:rPr lang="zh-TW" altLang="en-US" smtClean="0"/>
-              <a:t>2026/3/15</a:t>
+              <a:t>2026/3/16</a:t>
             </a:fld>
             <a:endParaRPr lang="zh-TW" altLang="en-US"/>
           </a:p>
@@ -2376,7 +2382,7 @@
           <a:p>
             <a:fld id="{C97265F6-423D-4142-A604-D1F95CB3D941}" type="datetimeFigureOut">
               <a:rPr lang="zh-TW" altLang="en-US" smtClean="0"/>
-              <a:t>2026/3/15</a:t>
+              <a:t>2026/3/16</a:t>
             </a:fld>
             <a:endParaRPr lang="zh-TW" altLang="en-US"/>
           </a:p>
@@ -2664,7 +2670,7 @@
           <a:p>
             <a:fld id="{C97265F6-423D-4142-A604-D1F95CB3D941}" type="datetimeFigureOut">
               <a:rPr lang="zh-TW" altLang="en-US" smtClean="0"/>
-              <a:t>2026/3/15</a:t>
+              <a:t>2026/3/16</a:t>
             </a:fld>
             <a:endParaRPr lang="zh-TW" altLang="en-US"/>
           </a:p>
@@ -2905,7 +2911,7 @@
           <a:p>
             <a:fld id="{C97265F6-423D-4142-A604-D1F95CB3D941}" type="datetimeFigureOut">
               <a:rPr lang="zh-TW" altLang="en-US" smtClean="0"/>
-              <a:t>2026/3/15</a:t>
+              <a:t>2026/3/16</a:t>
             </a:fld>
             <a:endParaRPr lang="zh-TW" altLang="en-US"/>
           </a:p>
@@ -4057,7 +4063,7 @@
         <p:spPr>
           <a:xfrm>
             <a:off x="2762539" y="1000702"/>
-            <a:ext cx="709324" cy="1034473"/>
+            <a:ext cx="954810" cy="1034473"/>
           </a:xfrm>
           <a:prstGeom prst="rect">
             <a:avLst/>
@@ -4094,6 +4100,17 @@
                 </a:solidFill>
               </a:rPr>
               <a:t>LPF</a:t>
+            </a:r>
+          </a:p>
+          <a:p>
+            <a:pPr algn="ctr"/>
+            <a:r>
+              <a:rPr lang="en-US" altLang="zh-TW" dirty="0">
+                <a:solidFill>
+                  <a:schemeClr val="tx1"/>
+                </a:solidFill>
+              </a:rPr>
+              <a:t>(48Hz)</a:t>
             </a:r>
             <a:endParaRPr lang="zh-TW" altLang="en-US" dirty="0">
               <a:solidFill>
@@ -4195,7 +4212,7 @@
         <p:spPr>
           <a:xfrm>
             <a:off x="2762539" y="2418022"/>
-            <a:ext cx="709324" cy="1034473"/>
+            <a:ext cx="954810" cy="1034473"/>
           </a:xfrm>
           <a:prstGeom prst="rect">
             <a:avLst/>
@@ -4232,6 +4249,17 @@
                 </a:solidFill>
               </a:rPr>
               <a:t>LPF</a:t>
+            </a:r>
+          </a:p>
+          <a:p>
+            <a:pPr algn="ctr"/>
+            <a:r>
+              <a:rPr lang="en-US" altLang="zh-TW" dirty="0">
+                <a:solidFill>
+                  <a:schemeClr val="tx1"/>
+                </a:solidFill>
+              </a:rPr>
+              <a:t>(41.6Hz)</a:t>
             </a:r>
             <a:endParaRPr lang="zh-TW" altLang="en-US" dirty="0">
               <a:solidFill>
@@ -4317,7 +4345,7 @@
         <p:spPr>
           <a:xfrm>
             <a:off x="2762539" y="4621818"/>
-            <a:ext cx="709324" cy="1034473"/>
+            <a:ext cx="954810" cy="1034473"/>
           </a:xfrm>
           <a:prstGeom prst="rect">
             <a:avLst/>
@@ -4354,6 +4382,17 @@
                 </a:solidFill>
               </a:rPr>
               <a:t>LPF</a:t>
+            </a:r>
+          </a:p>
+          <a:p>
+            <a:pPr algn="ctr"/>
+            <a:r>
+              <a:rPr lang="en-US" altLang="zh-TW" dirty="0">
+                <a:solidFill>
+                  <a:schemeClr val="tx1"/>
+                </a:solidFill>
+              </a:rPr>
+              <a:t>(100Hz)</a:t>
             </a:r>
             <a:endParaRPr lang="zh-TW" altLang="en-US" dirty="0">
               <a:solidFill>
@@ -4841,10 +4880,252 @@
           </a:fontRef>
         </p:style>
       </p:cxnSp>
+      <p:sp>
+        <p:nvSpPr>
+          <p:cNvPr id="11" name="文字方塊 10">
+            <a:extLst>
+              <a:ext uri="{FF2B5EF4-FFF2-40B4-BE49-F238E27FC236}">
+                <a16:creationId xmlns:a16="http://schemas.microsoft.com/office/drawing/2014/main" id="{B045F7E9-37A1-D375-5F2F-7EC20859BD83}"/>
+              </a:ext>
+            </a:extLst>
+          </p:cNvPr>
+          <p:cNvSpPr txBox="1"/>
+          <p:nvPr/>
+        </p:nvSpPr>
+        <p:spPr>
+          <a:xfrm>
+            <a:off x="4233557" y="2781595"/>
+            <a:ext cx="847311" cy="369332"/>
+          </a:xfrm>
+          <a:prstGeom prst="rect">
+            <a:avLst/>
+          </a:prstGeom>
+          <a:noFill/>
+        </p:spPr>
+        <p:txBody>
+          <a:bodyPr wrap="square">
+            <a:spAutoFit/>
+          </a:bodyPr>
+          <a:lstStyle/>
+          <a:p>
+            <a:r>
+              <a:rPr lang="en-US" altLang="zh-TW" dirty="0"/>
+              <a:t>200</a:t>
+            </a:r>
+            <a:r>
+              <a:rPr lang="en-US" altLang="zh-TW" dirty="0">
+                <a:solidFill>
+                  <a:schemeClr val="tx1"/>
+                </a:solidFill>
+              </a:rPr>
+              <a:t>Hz</a:t>
+            </a:r>
+            <a:endParaRPr lang="zh-TW" altLang="en-US" dirty="0"/>
+          </a:p>
+        </p:txBody>
+      </p:sp>
     </p:spTree>
     <p:extLst>
       <p:ext uri="{BB962C8B-B14F-4D97-AF65-F5344CB8AC3E}">
         <p14:creationId xmlns:p14="http://schemas.microsoft.com/office/powerpoint/2010/main" val="2134387232"/>
+      </p:ext>
+    </p:extLst>
+  </p:cSld>
+  <p:clrMapOvr>
+    <a:masterClrMapping/>
+  </p:clrMapOvr>
+</p:sld>
+</file>
+
+<file path=ppt/slides/slide3.xml><?xml version="1.0" encoding="utf-8"?>
+<p:sld xmlns:a="http://schemas.openxmlformats.org/drawingml/2006/main" xmlns:r="http://schemas.openxmlformats.org/officeDocument/2006/relationships" xmlns:p="http://schemas.openxmlformats.org/presentationml/2006/main">
+  <p:cSld>
+    <p:spTree>
+      <p:nvGrpSpPr>
+        <p:cNvPr id="1" name=""/>
+        <p:cNvGrpSpPr/>
+        <p:nvPr/>
+      </p:nvGrpSpPr>
+      <p:grpSpPr>
+        <a:xfrm>
+          <a:off x="0" y="0"/>
+          <a:ext cx="0" cy="0"/>
+          <a:chOff x="0" y="0"/>
+          <a:chExt cx="0" cy="0"/>
+        </a:xfrm>
+      </p:grpSpPr>
+      <p:pic>
+        <p:nvPicPr>
+          <p:cNvPr id="5" name="圖片 4">
+            <a:extLst>
+              <a:ext uri="{FF2B5EF4-FFF2-40B4-BE49-F238E27FC236}">
+                <a16:creationId xmlns:a16="http://schemas.microsoft.com/office/drawing/2014/main" id="{625FEC7A-48B7-3169-AED3-78085E1E417D}"/>
+              </a:ext>
+            </a:extLst>
+          </p:cNvPr>
+          <p:cNvPicPr>
+            <a:picLocks noChangeAspect="1"/>
+          </p:cNvPicPr>
+          <p:nvPr/>
+        </p:nvPicPr>
+        <p:blipFill>
+          <a:blip r:embed="rId2"/>
+          <a:stretch>
+            <a:fillRect/>
+          </a:stretch>
+        </p:blipFill>
+        <p:spPr>
+          <a:xfrm>
+            <a:off x="2907855" y="1095114"/>
+            <a:ext cx="5382376" cy="771633"/>
+          </a:xfrm>
+          <a:prstGeom prst="rect">
+            <a:avLst/>
+          </a:prstGeom>
+        </p:spPr>
+      </p:pic>
+      <mc:AlternateContent xmlns:mc="http://schemas.openxmlformats.org/markup-compatibility/2006">
+        <mc:Choice xmlns:a14="http://schemas.microsoft.com/office/drawing/2010/main" Requires="a14">
+          <p:sp>
+            <p:nvSpPr>
+              <p:cNvPr id="6" name="文字方塊 5">
+                <a:extLst>
+                  <a:ext uri="{FF2B5EF4-FFF2-40B4-BE49-F238E27FC236}">
+                    <a16:creationId xmlns:a16="http://schemas.microsoft.com/office/drawing/2014/main" id="{ABD9C7DF-12C7-7748-8E46-59BD1AB1CED5}"/>
+                  </a:ext>
+                </a:extLst>
+              </p:cNvPr>
+              <p:cNvSpPr txBox="1"/>
+              <p:nvPr/>
+            </p:nvSpPr>
+            <p:spPr>
+              <a:xfrm>
+                <a:off x="3373505" y="2675613"/>
+                <a:ext cx="938462" cy="276999"/>
+              </a:xfrm>
+              <a:prstGeom prst="rect">
+                <a:avLst/>
+              </a:prstGeom>
+              <a:noFill/>
+            </p:spPr>
+            <p:txBody>
+              <a:bodyPr wrap="none" lIns="0" tIns="0" rIns="0" bIns="0" rtlCol="0">
+                <a:spAutoFit/>
+              </a:bodyPr>
+              <a:lstStyle/>
+              <a:p>
+                <a14:m>
+                  <m:oMathPara xmlns:m="http://schemas.openxmlformats.org/officeDocument/2006/math">
+                    <m:oMathParaPr>
+                      <m:jc m:val="centerGroup"/>
+                    </m:oMathParaPr>
+                    <m:oMath xmlns:m="http://schemas.openxmlformats.org/officeDocument/2006/math">
+                      <m:r>
+                        <a:rPr lang="zh-TW" altLang="en-US" i="1" smtClean="0">
+                          <a:latin typeface="Cambria Math" panose="02040503050406030204" pitchFamily="18" charset="0"/>
+                        </a:rPr>
+                        <m:t>𝛼</m:t>
+                      </m:r>
+                      <m:r>
+                        <a:rPr lang="en-US" altLang="zh-TW" i="1" smtClean="0">
+                          <a:latin typeface="Cambria Math" panose="02040503050406030204" pitchFamily="18" charset="0"/>
+                        </a:rPr>
+                        <m:t>=</m:t>
+                      </m:r>
+                      <m:r>
+                        <a:rPr lang="en-US" altLang="zh-TW" b="0" i="1" smtClean="0">
+                          <a:latin typeface="Cambria Math" panose="02040503050406030204" pitchFamily="18" charset="0"/>
+                        </a:rPr>
+                        <m:t>2</m:t>
+                      </m:r>
+                      <m:r>
+                        <a:rPr lang="zh-TW" altLang="en-US" b="0" i="1" smtClean="0">
+                          <a:latin typeface="Cambria Math" panose="02040503050406030204" pitchFamily="18" charset="0"/>
+                        </a:rPr>
+                        <m:t>𝜋</m:t>
+                      </m:r>
+                      <m:sSub>
+                        <m:sSubPr>
+                          <m:ctrlPr>
+                            <a:rPr lang="en-US" altLang="zh-TW" b="0" i="1" smtClean="0">
+                              <a:latin typeface="Cambria Math" panose="02040503050406030204" pitchFamily="18" charset="0"/>
+                            </a:rPr>
+                          </m:ctrlPr>
+                        </m:sSubPr>
+                        <m:e>
+                          <m:r>
+                            <a:rPr lang="en-US" altLang="zh-TW" b="0" i="1" smtClean="0">
+                              <a:latin typeface="Cambria Math" panose="02040503050406030204" pitchFamily="18" charset="0"/>
+                            </a:rPr>
+                            <m:t>𝑓</m:t>
+                          </m:r>
+                        </m:e>
+                        <m:sub>
+                          <m:r>
+                            <a:rPr lang="en-US" altLang="zh-TW" b="0" i="1" smtClean="0">
+                              <a:latin typeface="Cambria Math" panose="02040503050406030204" pitchFamily="18" charset="0"/>
+                            </a:rPr>
+                            <m:t>𝑠</m:t>
+                          </m:r>
+                        </m:sub>
+                      </m:sSub>
+                    </m:oMath>
+                  </m:oMathPara>
+                </a14:m>
+                <a:endParaRPr lang="zh-TW" altLang="en-US" dirty="0"/>
+              </a:p>
+            </p:txBody>
+          </p:sp>
+        </mc:Choice>
+        <mc:Fallback>
+          <p:sp>
+            <p:nvSpPr>
+              <p:cNvPr id="6" name="文字方塊 5">
+                <a:extLst>
+                  <a:ext uri="{FF2B5EF4-FFF2-40B4-BE49-F238E27FC236}">
+                    <a16:creationId xmlns:a16="http://schemas.microsoft.com/office/drawing/2014/main" id="{ABD9C7DF-12C7-7748-8E46-59BD1AB1CED5}"/>
+                  </a:ext>
+                </a:extLst>
+              </p:cNvPr>
+              <p:cNvSpPr txBox="1">
+                <a:spLocks noRot="1" noChangeAspect="1" noMove="1" noResize="1" noEditPoints="1" noAdjustHandles="1" noChangeArrowheads="1" noChangeShapeType="1" noTextEdit="1"/>
+              </p:cNvSpPr>
+              <p:nvPr/>
+            </p:nvSpPr>
+            <p:spPr>
+              <a:xfrm>
+                <a:off x="3373505" y="2675613"/>
+                <a:ext cx="938462" cy="276999"/>
+              </a:xfrm>
+              <a:prstGeom prst="rect">
+                <a:avLst/>
+              </a:prstGeom>
+              <a:blipFill>
+                <a:blip r:embed="rId3"/>
+                <a:stretch>
+                  <a:fillRect l="-3247" t="-2222" r="-3896" b="-35556"/>
+                </a:stretch>
+              </a:blipFill>
+            </p:spPr>
+            <p:txBody>
+              <a:bodyPr/>
+              <a:lstStyle/>
+              <a:p>
+                <a:r>
+                  <a:rPr lang="zh-TW" altLang="en-US">
+                    <a:noFill/>
+                  </a:rPr>
+                  <a:t> </a:t>
+                </a:r>
+              </a:p>
+            </p:txBody>
+          </p:sp>
+        </mc:Fallback>
+      </mc:AlternateContent>
+    </p:spTree>
+    <p:extLst>
+      <p:ext uri="{BB962C8B-B14F-4D97-AF65-F5344CB8AC3E}">
+        <p14:creationId xmlns:p14="http://schemas.microsoft.com/office/powerpoint/2010/main" val="2467721791"/>
       </p:ext>
     </p:extLst>
   </p:cSld>

--- a/intel_IP/LGSM/doc/LGSM BW.pptx
+++ b/intel_IP/LGSM/doc/LGSM BW.pptx
@@ -5,8 +5,8 @@
     <p:sldMasterId id="2147483648" r:id="rId1"/>
   </p:sldMasterIdLst>
   <p:sldIdLst>
-    <p:sldId id="256" r:id="rId2"/>
-    <p:sldId id="257" r:id="rId3"/>
+    <p:sldId id="257" r:id="rId2"/>
+    <p:sldId id="258" r:id="rId3"/>
   </p:sldIdLst>
   <p:sldSz cx="12192000" cy="6858000"/>
   <p:notesSz cx="6858000" cy="9144000"/>
@@ -105,6 +105,11 @@
       </a:defRPr>
     </a:lvl9pPr>
   </p:defaultTextStyle>
+  <p:extLst>
+    <p:ext uri="{EFAFB233-063F-42B5-8137-9DF3F51BA10A}">
+      <p15:sldGuideLst xmlns:p15="http://schemas.microsoft.com/office/powerpoint/2012/main"/>
+    </p:ext>
+  </p:extLst>
 </p:presentation>
 </file>
 
@@ -255,7 +260,7 @@
           <a:p>
             <a:fld id="{C97265F6-423D-4142-A604-D1F95CB3D941}" type="datetimeFigureOut">
               <a:rPr lang="zh-TW" altLang="en-US" smtClean="0"/>
-              <a:t>2026/3/15</a:t>
+              <a:t>2026/3/16</a:t>
             </a:fld>
             <a:endParaRPr lang="zh-TW" altLang="en-US"/>
           </a:p>
@@ -453,7 +458,7 @@
           <a:p>
             <a:fld id="{C97265F6-423D-4142-A604-D1F95CB3D941}" type="datetimeFigureOut">
               <a:rPr lang="zh-TW" altLang="en-US" smtClean="0"/>
-              <a:t>2026/3/15</a:t>
+              <a:t>2026/3/16</a:t>
             </a:fld>
             <a:endParaRPr lang="zh-TW" altLang="en-US"/>
           </a:p>
@@ -661,7 +666,7 @@
           <a:p>
             <a:fld id="{C97265F6-423D-4142-A604-D1F95CB3D941}" type="datetimeFigureOut">
               <a:rPr lang="zh-TW" altLang="en-US" smtClean="0"/>
-              <a:t>2026/3/15</a:t>
+              <a:t>2026/3/16</a:t>
             </a:fld>
             <a:endParaRPr lang="zh-TW" altLang="en-US"/>
           </a:p>
@@ -859,7 +864,7 @@
           <a:p>
             <a:fld id="{C97265F6-423D-4142-A604-D1F95CB3D941}" type="datetimeFigureOut">
               <a:rPr lang="zh-TW" altLang="en-US" smtClean="0"/>
-              <a:t>2026/3/15</a:t>
+              <a:t>2026/3/16</a:t>
             </a:fld>
             <a:endParaRPr lang="zh-TW" altLang="en-US"/>
           </a:p>
@@ -1134,7 +1139,7 @@
           <a:p>
             <a:fld id="{C97265F6-423D-4142-A604-D1F95CB3D941}" type="datetimeFigureOut">
               <a:rPr lang="zh-TW" altLang="en-US" smtClean="0"/>
-              <a:t>2026/3/15</a:t>
+              <a:t>2026/3/16</a:t>
             </a:fld>
             <a:endParaRPr lang="zh-TW" altLang="en-US"/>
           </a:p>
@@ -1399,7 +1404,7 @@
           <a:p>
             <a:fld id="{C97265F6-423D-4142-A604-D1F95CB3D941}" type="datetimeFigureOut">
               <a:rPr lang="zh-TW" altLang="en-US" smtClean="0"/>
-              <a:t>2026/3/15</a:t>
+              <a:t>2026/3/16</a:t>
             </a:fld>
             <a:endParaRPr lang="zh-TW" altLang="en-US"/>
           </a:p>
@@ -1811,7 +1816,7 @@
           <a:p>
             <a:fld id="{C97265F6-423D-4142-A604-D1F95CB3D941}" type="datetimeFigureOut">
               <a:rPr lang="zh-TW" altLang="en-US" smtClean="0"/>
-              <a:t>2026/3/15</a:t>
+              <a:t>2026/3/16</a:t>
             </a:fld>
             <a:endParaRPr lang="zh-TW" altLang="en-US"/>
           </a:p>
@@ -1952,7 +1957,7 @@
           <a:p>
             <a:fld id="{C97265F6-423D-4142-A604-D1F95CB3D941}" type="datetimeFigureOut">
               <a:rPr lang="zh-TW" altLang="en-US" smtClean="0"/>
-              <a:t>2026/3/15</a:t>
+              <a:t>2026/3/16</a:t>
             </a:fld>
             <a:endParaRPr lang="zh-TW" altLang="en-US"/>
           </a:p>
@@ -2065,7 +2070,7 @@
           <a:p>
             <a:fld id="{C97265F6-423D-4142-A604-D1F95CB3D941}" type="datetimeFigureOut">
               <a:rPr lang="zh-TW" altLang="en-US" smtClean="0"/>
-              <a:t>2026/3/15</a:t>
+              <a:t>2026/3/16</a:t>
             </a:fld>
             <a:endParaRPr lang="zh-TW" altLang="en-US"/>
           </a:p>
@@ -2376,7 +2381,7 @@
           <a:p>
             <a:fld id="{C97265F6-423D-4142-A604-D1F95CB3D941}" type="datetimeFigureOut">
               <a:rPr lang="zh-TW" altLang="en-US" smtClean="0"/>
-              <a:t>2026/3/15</a:t>
+              <a:t>2026/3/16</a:t>
             </a:fld>
             <a:endParaRPr lang="zh-TW" altLang="en-US"/>
           </a:p>
@@ -2664,7 +2669,7 @@
           <a:p>
             <a:fld id="{C97265F6-423D-4142-A604-D1F95CB3D941}" type="datetimeFigureOut">
               <a:rPr lang="zh-TW" altLang="en-US" smtClean="0"/>
-              <a:t>2026/3/15</a:t>
+              <a:t>2026/3/16</a:t>
             </a:fld>
             <a:endParaRPr lang="zh-TW" altLang="en-US"/>
           </a:p>
@@ -2905,7 +2910,7 @@
           <a:p>
             <a:fld id="{C97265F6-423D-4142-A604-D1F95CB3D941}" type="datetimeFigureOut">
               <a:rPr lang="zh-TW" altLang="en-US" smtClean="0"/>
-              <a:t>2026/3/15</a:t>
+              <a:t>2026/3/16</a:t>
             </a:fld>
             <a:endParaRPr lang="zh-TW" altLang="en-US"/>
           </a:p>
@@ -3310,643 +3315,6 @@
   <p:cSld>
     <p:spTree>
       <p:nvGrpSpPr>
-        <p:cNvPr id="1" name=""/>
-        <p:cNvGrpSpPr/>
-        <p:nvPr/>
-      </p:nvGrpSpPr>
-      <p:grpSpPr>
-        <a:xfrm>
-          <a:off x="0" y="0"/>
-          <a:ext cx="0" cy="0"/>
-          <a:chOff x="0" y="0"/>
-          <a:chExt cx="0" cy="0"/>
-        </a:xfrm>
-      </p:grpSpPr>
-      <p:sp>
-        <p:nvSpPr>
-          <p:cNvPr id="4" name="矩形 3">
-            <a:extLst>
-              <a:ext uri="{FF2B5EF4-FFF2-40B4-BE49-F238E27FC236}">
-                <a16:creationId xmlns:a16="http://schemas.microsoft.com/office/drawing/2014/main" id="{90186A8A-6E85-C619-6A24-58AB4F96C45D}"/>
-              </a:ext>
-            </a:extLst>
-          </p:cNvPr>
-          <p:cNvSpPr/>
-          <p:nvPr/>
-        </p:nvSpPr>
-        <p:spPr>
-          <a:xfrm>
-            <a:off x="3278910" y="1357745"/>
-            <a:ext cx="1209963" cy="967509"/>
-          </a:xfrm>
-          <a:prstGeom prst="rect">
-            <a:avLst/>
-          </a:prstGeom>
-          <a:solidFill>
-            <a:schemeClr val="bg1"/>
-          </a:solidFill>
-        </p:spPr>
-        <p:style>
-          <a:lnRef idx="2">
-            <a:schemeClr val="accent1">
-              <a:shade val="15000"/>
-            </a:schemeClr>
-          </a:lnRef>
-          <a:fillRef idx="1">
-            <a:schemeClr val="accent1"/>
-          </a:fillRef>
-          <a:effectRef idx="0">
-            <a:schemeClr val="accent1"/>
-          </a:effectRef>
-          <a:fontRef idx="minor">
-            <a:schemeClr val="lt1"/>
-          </a:fontRef>
-        </p:style>
-        <p:txBody>
-          <a:bodyPr rtlCol="0" anchor="ctr"/>
-          <a:lstStyle/>
-          <a:p>
-            <a:pPr algn="ctr"/>
-            <a:r>
-              <a:rPr lang="en-US" altLang="zh-TW" dirty="0">
-                <a:solidFill>
-                  <a:sysClr val="windowText" lastClr="000000"/>
-                </a:solidFill>
-              </a:rPr>
-              <a:t>FOG</a:t>
-            </a:r>
-            <a:endParaRPr lang="zh-TW" altLang="en-US" dirty="0">
-              <a:solidFill>
-                <a:sysClr val="windowText" lastClr="000000"/>
-              </a:solidFill>
-            </a:endParaRPr>
-          </a:p>
-        </p:txBody>
-      </p:sp>
-      <p:sp>
-        <p:nvSpPr>
-          <p:cNvPr id="5" name="矩形 4">
-            <a:extLst>
-              <a:ext uri="{FF2B5EF4-FFF2-40B4-BE49-F238E27FC236}">
-                <a16:creationId xmlns:a16="http://schemas.microsoft.com/office/drawing/2014/main" id="{0F6D2D94-EACA-F6D7-CCC1-958021508815}"/>
-              </a:ext>
-            </a:extLst>
-          </p:cNvPr>
-          <p:cNvSpPr/>
-          <p:nvPr/>
-        </p:nvSpPr>
-        <p:spPr>
-          <a:xfrm>
-            <a:off x="8742219" y="3343563"/>
-            <a:ext cx="1856509" cy="1413164"/>
-          </a:xfrm>
-          <a:prstGeom prst="rect">
-            <a:avLst/>
-          </a:prstGeom>
-          <a:solidFill>
-            <a:schemeClr val="bg1"/>
-          </a:solidFill>
-        </p:spPr>
-        <p:style>
-          <a:lnRef idx="2">
-            <a:schemeClr val="accent1">
-              <a:shade val="15000"/>
-            </a:schemeClr>
-          </a:lnRef>
-          <a:fillRef idx="1">
-            <a:schemeClr val="accent1"/>
-          </a:fillRef>
-          <a:effectRef idx="0">
-            <a:schemeClr val="accent1"/>
-          </a:effectRef>
-          <a:fontRef idx="minor">
-            <a:schemeClr val="lt1"/>
-          </a:fontRef>
-        </p:style>
-        <p:txBody>
-          <a:bodyPr rtlCol="0" anchor="ctr"/>
-          <a:lstStyle/>
-          <a:p>
-            <a:pPr algn="ctr"/>
-            <a:r>
-              <a:rPr lang="en-US" altLang="zh-TW" dirty="0">
-                <a:solidFill>
-                  <a:sysClr val="windowText" lastClr="000000"/>
-                </a:solidFill>
-              </a:rPr>
-              <a:t>MCU data hub</a:t>
-            </a:r>
-            <a:endParaRPr lang="zh-TW" altLang="en-US" dirty="0">
-              <a:solidFill>
-                <a:sysClr val="windowText" lastClr="000000"/>
-              </a:solidFill>
-            </a:endParaRPr>
-          </a:p>
-        </p:txBody>
-      </p:sp>
-      <p:sp>
-        <p:nvSpPr>
-          <p:cNvPr id="6" name="矩形 5">
-            <a:extLst>
-              <a:ext uri="{FF2B5EF4-FFF2-40B4-BE49-F238E27FC236}">
-                <a16:creationId xmlns:a16="http://schemas.microsoft.com/office/drawing/2014/main" id="{01BEB4BE-C06C-EC1C-DA8F-4E9AA082294B}"/>
-              </a:ext>
-            </a:extLst>
-          </p:cNvPr>
-          <p:cNvSpPr/>
-          <p:nvPr/>
-        </p:nvSpPr>
-        <p:spPr>
-          <a:xfrm>
-            <a:off x="3241965" y="4050145"/>
-            <a:ext cx="1283854" cy="1048328"/>
-          </a:xfrm>
-          <a:prstGeom prst="rect">
-            <a:avLst/>
-          </a:prstGeom>
-          <a:solidFill>
-            <a:schemeClr val="bg1"/>
-          </a:solidFill>
-        </p:spPr>
-        <p:style>
-          <a:lnRef idx="2">
-            <a:schemeClr val="accent1">
-              <a:shade val="15000"/>
-            </a:schemeClr>
-          </a:lnRef>
-          <a:fillRef idx="1">
-            <a:schemeClr val="accent1"/>
-          </a:fillRef>
-          <a:effectRef idx="0">
-            <a:schemeClr val="accent1"/>
-          </a:effectRef>
-          <a:fontRef idx="minor">
-            <a:schemeClr val="lt1"/>
-          </a:fontRef>
-        </p:style>
-        <p:txBody>
-          <a:bodyPr rtlCol="0" anchor="ctr"/>
-          <a:lstStyle/>
-          <a:p>
-            <a:pPr algn="ctr"/>
-            <a:r>
-              <a:rPr lang="en-US" altLang="zh-TW" dirty="0">
-                <a:solidFill>
-                  <a:sysClr val="windowText" lastClr="000000"/>
-                </a:solidFill>
-              </a:rPr>
-              <a:t>MEMS</a:t>
-            </a:r>
-            <a:r>
-              <a:rPr lang="zh-TW" altLang="en-US" dirty="0">
-                <a:solidFill>
-                  <a:sysClr val="windowText" lastClr="000000"/>
-                </a:solidFill>
-              </a:rPr>
-              <a:t> </a:t>
-            </a:r>
-            <a:r>
-              <a:rPr lang="en-US" altLang="zh-TW" dirty="0">
-                <a:solidFill>
-                  <a:sysClr val="windowText" lastClr="000000"/>
-                </a:solidFill>
-              </a:rPr>
-              <a:t>GYRO</a:t>
-            </a:r>
-            <a:endParaRPr lang="zh-TW" altLang="en-US" dirty="0">
-              <a:solidFill>
-                <a:sysClr val="windowText" lastClr="000000"/>
-              </a:solidFill>
-            </a:endParaRPr>
-          </a:p>
-        </p:txBody>
-      </p:sp>
-      <p:sp>
-        <p:nvSpPr>
-          <p:cNvPr id="7" name="矩形 6">
-            <a:extLst>
-              <a:ext uri="{FF2B5EF4-FFF2-40B4-BE49-F238E27FC236}">
-                <a16:creationId xmlns:a16="http://schemas.microsoft.com/office/drawing/2014/main" id="{42A03FEE-BE98-0734-98A1-71D9309B4027}"/>
-              </a:ext>
-            </a:extLst>
-          </p:cNvPr>
-          <p:cNvSpPr/>
-          <p:nvPr/>
-        </p:nvSpPr>
-        <p:spPr>
-          <a:xfrm>
-            <a:off x="5966691" y="3026063"/>
-            <a:ext cx="1856509" cy="805873"/>
-          </a:xfrm>
-          <a:prstGeom prst="rect">
-            <a:avLst/>
-          </a:prstGeom>
-          <a:solidFill>
-            <a:schemeClr val="bg1"/>
-          </a:solidFill>
-        </p:spPr>
-        <p:style>
-          <a:lnRef idx="2">
-            <a:schemeClr val="accent1">
-              <a:shade val="15000"/>
-            </a:schemeClr>
-          </a:lnRef>
-          <a:fillRef idx="1">
-            <a:schemeClr val="accent1"/>
-          </a:fillRef>
-          <a:effectRef idx="0">
-            <a:schemeClr val="accent1"/>
-          </a:effectRef>
-          <a:fontRef idx="minor">
-            <a:schemeClr val="lt1"/>
-          </a:fontRef>
-        </p:style>
-        <p:txBody>
-          <a:bodyPr rtlCol="0" anchor="ctr"/>
-          <a:lstStyle/>
-          <a:p>
-            <a:pPr algn="ctr"/>
-            <a:r>
-              <a:rPr lang="en-US" altLang="zh-TW" dirty="0">
-                <a:solidFill>
-                  <a:sysClr val="windowText" lastClr="000000"/>
-                </a:solidFill>
-              </a:rPr>
-              <a:t>MCU SYNC</a:t>
-            </a:r>
-            <a:endParaRPr lang="zh-TW" altLang="en-US" dirty="0">
-              <a:solidFill>
-                <a:sysClr val="windowText" lastClr="000000"/>
-              </a:solidFill>
-            </a:endParaRPr>
-          </a:p>
-        </p:txBody>
-      </p:sp>
-      <p:sp>
-        <p:nvSpPr>
-          <p:cNvPr id="8" name="矩形 7">
-            <a:extLst>
-              <a:ext uri="{FF2B5EF4-FFF2-40B4-BE49-F238E27FC236}">
-                <a16:creationId xmlns:a16="http://schemas.microsoft.com/office/drawing/2014/main" id="{CA9B482D-FD54-9EA9-DF72-4FF2280979BA}"/>
-              </a:ext>
-            </a:extLst>
-          </p:cNvPr>
-          <p:cNvSpPr/>
-          <p:nvPr/>
-        </p:nvSpPr>
-        <p:spPr>
-          <a:xfrm>
-            <a:off x="3241965" y="5456381"/>
-            <a:ext cx="1283854" cy="1048328"/>
-          </a:xfrm>
-          <a:prstGeom prst="rect">
-            <a:avLst/>
-          </a:prstGeom>
-          <a:solidFill>
-            <a:schemeClr val="bg1"/>
-          </a:solidFill>
-        </p:spPr>
-        <p:style>
-          <a:lnRef idx="2">
-            <a:schemeClr val="accent1">
-              <a:shade val="15000"/>
-            </a:schemeClr>
-          </a:lnRef>
-          <a:fillRef idx="1">
-            <a:schemeClr val="accent1"/>
-          </a:fillRef>
-          <a:effectRef idx="0">
-            <a:schemeClr val="accent1"/>
-          </a:effectRef>
-          <a:fontRef idx="minor">
-            <a:schemeClr val="lt1"/>
-          </a:fontRef>
-        </p:style>
-        <p:txBody>
-          <a:bodyPr rtlCol="0" anchor="ctr"/>
-          <a:lstStyle/>
-          <a:p>
-            <a:pPr algn="ctr"/>
-            <a:r>
-              <a:rPr lang="en-US" altLang="zh-TW" dirty="0">
-                <a:solidFill>
-                  <a:sysClr val="windowText" lastClr="000000"/>
-                </a:solidFill>
-              </a:rPr>
-              <a:t>MEMS</a:t>
-            </a:r>
-            <a:r>
-              <a:rPr lang="zh-TW" altLang="en-US" dirty="0">
-                <a:solidFill>
-                  <a:sysClr val="windowText" lastClr="000000"/>
-                </a:solidFill>
-              </a:rPr>
-              <a:t> </a:t>
-            </a:r>
-            <a:r>
-              <a:rPr lang="en-US" altLang="zh-TW" dirty="0">
-                <a:solidFill>
-                  <a:sysClr val="windowText" lastClr="000000"/>
-                </a:solidFill>
-              </a:rPr>
-              <a:t>ACCL</a:t>
-            </a:r>
-            <a:endParaRPr lang="zh-TW" altLang="en-US" dirty="0">
-              <a:solidFill>
-                <a:sysClr val="windowText" lastClr="000000"/>
-              </a:solidFill>
-            </a:endParaRPr>
-          </a:p>
-        </p:txBody>
-      </p:sp>
-      <p:cxnSp>
-        <p:nvCxnSpPr>
-          <p:cNvPr id="10" name="接點: 肘形 9">
-            <a:extLst>
-              <a:ext uri="{FF2B5EF4-FFF2-40B4-BE49-F238E27FC236}">
-                <a16:creationId xmlns:a16="http://schemas.microsoft.com/office/drawing/2014/main" id="{EFB36810-8470-410D-F26F-0E6B0C567000}"/>
-              </a:ext>
-            </a:extLst>
-          </p:cNvPr>
-          <p:cNvCxnSpPr>
-            <a:stCxn id="7" idx="1"/>
-            <a:endCxn id="4" idx="3"/>
-          </p:cNvCxnSpPr>
-          <p:nvPr/>
-        </p:nvCxnSpPr>
-        <p:spPr>
-          <a:xfrm rot="10800000">
-            <a:off x="4488873" y="1841500"/>
-            <a:ext cx="1477818" cy="1587500"/>
-          </a:xfrm>
-          <a:prstGeom prst="bentConnector3">
-            <a:avLst/>
-          </a:prstGeom>
-          <a:ln>
-            <a:tailEnd type="triangle"/>
-          </a:ln>
-        </p:spPr>
-        <p:style>
-          <a:lnRef idx="2">
-            <a:schemeClr val="accent1"/>
-          </a:lnRef>
-          <a:fillRef idx="0">
-            <a:schemeClr val="accent1"/>
-          </a:fillRef>
-          <a:effectRef idx="1">
-            <a:schemeClr val="accent1"/>
-          </a:effectRef>
-          <a:fontRef idx="minor">
-            <a:schemeClr val="tx1"/>
-          </a:fontRef>
-        </p:style>
-      </p:cxnSp>
-      <p:cxnSp>
-        <p:nvCxnSpPr>
-          <p:cNvPr id="12" name="接點: 肘形 11">
-            <a:extLst>
-              <a:ext uri="{FF2B5EF4-FFF2-40B4-BE49-F238E27FC236}">
-                <a16:creationId xmlns:a16="http://schemas.microsoft.com/office/drawing/2014/main" id="{02C7DAAF-7B3C-8F46-0554-57176897EF15}"/>
-              </a:ext>
-            </a:extLst>
-          </p:cNvPr>
-          <p:cNvCxnSpPr>
-            <a:stCxn id="7" idx="1"/>
-            <a:endCxn id="6" idx="3"/>
-          </p:cNvCxnSpPr>
-          <p:nvPr/>
-        </p:nvCxnSpPr>
-        <p:spPr>
-          <a:xfrm rot="10800000" flipV="1">
-            <a:off x="4525819" y="3428999"/>
-            <a:ext cx="1440872" cy="1145309"/>
-          </a:xfrm>
-          <a:prstGeom prst="bentConnector3">
-            <a:avLst/>
-          </a:prstGeom>
-          <a:ln>
-            <a:tailEnd type="triangle"/>
-          </a:ln>
-        </p:spPr>
-        <p:style>
-          <a:lnRef idx="2">
-            <a:schemeClr val="accent1"/>
-          </a:lnRef>
-          <a:fillRef idx="0">
-            <a:schemeClr val="accent1"/>
-          </a:fillRef>
-          <a:effectRef idx="1">
-            <a:schemeClr val="accent1"/>
-          </a:effectRef>
-          <a:fontRef idx="minor">
-            <a:schemeClr val="tx1"/>
-          </a:fontRef>
-        </p:style>
-      </p:cxnSp>
-      <p:cxnSp>
-        <p:nvCxnSpPr>
-          <p:cNvPr id="14" name="接點: 肘形 13">
-            <a:extLst>
-              <a:ext uri="{FF2B5EF4-FFF2-40B4-BE49-F238E27FC236}">
-                <a16:creationId xmlns:a16="http://schemas.microsoft.com/office/drawing/2014/main" id="{F6C26583-2911-87D6-5A1C-4321617EDE8A}"/>
-              </a:ext>
-            </a:extLst>
-          </p:cNvPr>
-          <p:cNvCxnSpPr>
-            <a:stCxn id="7" idx="1"/>
-            <a:endCxn id="8" idx="3"/>
-          </p:cNvCxnSpPr>
-          <p:nvPr/>
-        </p:nvCxnSpPr>
-        <p:spPr>
-          <a:xfrm rot="10800000" flipV="1">
-            <a:off x="4525819" y="3428999"/>
-            <a:ext cx="1440872" cy="2551545"/>
-          </a:xfrm>
-          <a:prstGeom prst="bentConnector3">
-            <a:avLst/>
-          </a:prstGeom>
-          <a:ln>
-            <a:tailEnd type="triangle"/>
-          </a:ln>
-        </p:spPr>
-        <p:style>
-          <a:lnRef idx="2">
-            <a:schemeClr val="accent1"/>
-          </a:lnRef>
-          <a:fillRef idx="0">
-            <a:schemeClr val="accent1"/>
-          </a:fillRef>
-          <a:effectRef idx="1">
-            <a:schemeClr val="accent1"/>
-          </a:effectRef>
-          <a:fontRef idx="minor">
-            <a:schemeClr val="tx1"/>
-          </a:fontRef>
-        </p:style>
-      </p:cxnSp>
-      <p:sp>
-        <p:nvSpPr>
-          <p:cNvPr id="15" name="文字方塊 14">
-            <a:extLst>
-              <a:ext uri="{FF2B5EF4-FFF2-40B4-BE49-F238E27FC236}">
-                <a16:creationId xmlns:a16="http://schemas.microsoft.com/office/drawing/2014/main" id="{D0C4D9B2-9187-1DAE-31EF-C0C9D38ACFBD}"/>
-              </a:ext>
-            </a:extLst>
-          </p:cNvPr>
-          <p:cNvSpPr txBox="1"/>
-          <p:nvPr/>
-        </p:nvSpPr>
-        <p:spPr>
-          <a:xfrm>
-            <a:off x="5329382" y="2325254"/>
-            <a:ext cx="865943" cy="369332"/>
-          </a:xfrm>
-          <a:prstGeom prst="rect">
-            <a:avLst/>
-          </a:prstGeom>
-          <a:noFill/>
-        </p:spPr>
-        <p:txBody>
-          <a:bodyPr wrap="none" rtlCol="0">
-            <a:spAutoFit/>
-          </a:bodyPr>
-          <a:lstStyle/>
-          <a:p>
-            <a:r>
-              <a:rPr lang="en-US" altLang="zh-TW" dirty="0"/>
-              <a:t>200 Hz</a:t>
-            </a:r>
-            <a:endParaRPr lang="zh-TW" altLang="en-US" dirty="0"/>
-          </a:p>
-        </p:txBody>
-      </p:sp>
-      <p:sp>
-        <p:nvSpPr>
-          <p:cNvPr id="16" name="文字方塊 15">
-            <a:extLst>
-              <a:ext uri="{FF2B5EF4-FFF2-40B4-BE49-F238E27FC236}">
-                <a16:creationId xmlns:a16="http://schemas.microsoft.com/office/drawing/2014/main" id="{C1C974C5-ADDF-0D97-A488-786A164F94DC}"/>
-              </a:ext>
-            </a:extLst>
-          </p:cNvPr>
-          <p:cNvSpPr txBox="1"/>
-          <p:nvPr/>
-        </p:nvSpPr>
-        <p:spPr>
-          <a:xfrm>
-            <a:off x="4448211" y="1455366"/>
-            <a:ext cx="1314142" cy="369332"/>
-          </a:xfrm>
-          <a:prstGeom prst="rect">
-            <a:avLst/>
-          </a:prstGeom>
-          <a:noFill/>
-        </p:spPr>
-        <p:txBody>
-          <a:bodyPr wrap="none" rtlCol="0">
-            <a:spAutoFit/>
-          </a:bodyPr>
-          <a:lstStyle/>
-          <a:p>
-            <a:r>
-              <a:rPr lang="en-US" altLang="zh-TW" dirty="0"/>
-              <a:t>BW: 100 Hz</a:t>
-            </a:r>
-            <a:endParaRPr lang="zh-TW" altLang="en-US" dirty="0"/>
-          </a:p>
-        </p:txBody>
-      </p:sp>
-      <p:sp>
-        <p:nvSpPr>
-          <p:cNvPr id="17" name="文字方塊 16">
-            <a:extLst>
-              <a:ext uri="{FF2B5EF4-FFF2-40B4-BE49-F238E27FC236}">
-                <a16:creationId xmlns:a16="http://schemas.microsoft.com/office/drawing/2014/main" id="{7A65AF2B-4BB5-E0C5-5B4F-273ABF61ED39}"/>
-              </a:ext>
-            </a:extLst>
-          </p:cNvPr>
-          <p:cNvSpPr txBox="1"/>
-          <p:nvPr/>
-        </p:nvSpPr>
-        <p:spPr>
-          <a:xfrm>
-            <a:off x="4448211" y="4199265"/>
-            <a:ext cx="1190711" cy="369332"/>
-          </a:xfrm>
-          <a:prstGeom prst="rect">
-            <a:avLst/>
-          </a:prstGeom>
-          <a:noFill/>
-        </p:spPr>
-        <p:txBody>
-          <a:bodyPr wrap="none" rtlCol="0">
-            <a:spAutoFit/>
-          </a:bodyPr>
-          <a:lstStyle/>
-          <a:p>
-            <a:r>
-              <a:rPr lang="en-US" altLang="zh-TW" dirty="0"/>
-              <a:t>BW: 86 Hz</a:t>
-            </a:r>
-            <a:endParaRPr lang="zh-TW" altLang="en-US" dirty="0"/>
-          </a:p>
-        </p:txBody>
-      </p:sp>
-      <p:sp>
-        <p:nvSpPr>
-          <p:cNvPr id="18" name="文字方塊 17">
-            <a:extLst>
-              <a:ext uri="{FF2B5EF4-FFF2-40B4-BE49-F238E27FC236}">
-                <a16:creationId xmlns:a16="http://schemas.microsoft.com/office/drawing/2014/main" id="{1808A3FA-567A-7832-771D-21A5C441DDA9}"/>
-              </a:ext>
-            </a:extLst>
-          </p:cNvPr>
-          <p:cNvSpPr txBox="1"/>
-          <p:nvPr/>
-        </p:nvSpPr>
-        <p:spPr>
-          <a:xfrm>
-            <a:off x="4509926" y="5534951"/>
-            <a:ext cx="1379865" cy="369332"/>
-          </a:xfrm>
-          <a:prstGeom prst="rect">
-            <a:avLst/>
-          </a:prstGeom>
-          <a:noFill/>
-        </p:spPr>
-        <p:txBody>
-          <a:bodyPr wrap="none" rtlCol="0">
-            <a:spAutoFit/>
-          </a:bodyPr>
-          <a:lstStyle/>
-          <a:p>
-            <a:r>
-              <a:rPr lang="en-US" altLang="zh-TW" dirty="0"/>
-              <a:t>BW: 41.6 Hz</a:t>
-            </a:r>
-            <a:endParaRPr lang="zh-TW" altLang="en-US" dirty="0"/>
-          </a:p>
-        </p:txBody>
-      </p:sp>
-    </p:spTree>
-    <p:extLst>
-      <p:ext uri="{BB962C8B-B14F-4D97-AF65-F5344CB8AC3E}">
-        <p14:creationId xmlns:p14="http://schemas.microsoft.com/office/powerpoint/2010/main" val="4267118724"/>
-      </p:ext>
-    </p:extLst>
-  </p:cSld>
-  <p:clrMapOvr>
-    <a:masterClrMapping/>
-  </p:clrMapOvr>
-</p:sld>
-</file>
-
-<file path=ppt/slides/slide2.xml><?xml version="1.0" encoding="utf-8"?>
-<p:sld xmlns:a="http://schemas.openxmlformats.org/drawingml/2006/main" xmlns:r="http://schemas.openxmlformats.org/officeDocument/2006/relationships" xmlns:p="http://schemas.openxmlformats.org/presentationml/2006/main">
-  <p:cSld>
-    <p:spTree>
-      <p:nvGrpSpPr>
         <p:cNvPr id="1" name="">
           <a:extLst>
             <a:ext uri="{FF2B5EF4-FFF2-40B4-BE49-F238E27FC236}">
@@ -4057,7 +3425,7 @@
         <p:spPr>
           <a:xfrm>
             <a:off x="2762539" y="1000702"/>
-            <a:ext cx="709324" cy="1034473"/>
+            <a:ext cx="954810" cy="1034473"/>
           </a:xfrm>
           <a:prstGeom prst="rect">
             <a:avLst/>
@@ -4094,6 +3462,17 @@
                 </a:solidFill>
               </a:rPr>
               <a:t>LPF</a:t>
+            </a:r>
+          </a:p>
+          <a:p>
+            <a:pPr algn="ctr"/>
+            <a:r>
+              <a:rPr lang="en-US" altLang="zh-TW" dirty="0">
+                <a:solidFill>
+                  <a:schemeClr val="tx1"/>
+                </a:solidFill>
+              </a:rPr>
+              <a:t>(48 Hz)</a:t>
             </a:r>
             <a:endParaRPr lang="zh-TW" altLang="en-US" dirty="0">
               <a:solidFill>
@@ -4194,8 +3573,8 @@
         </p:nvSpPr>
         <p:spPr>
           <a:xfrm>
-            <a:off x="2762539" y="2418022"/>
-            <a:ext cx="709324" cy="1034473"/>
+            <a:off x="2762538" y="2418022"/>
+            <a:ext cx="1017731" cy="1034473"/>
           </a:xfrm>
           <a:prstGeom prst="rect">
             <a:avLst/>
@@ -4232,6 +3611,17 @@
                 </a:solidFill>
               </a:rPr>
               <a:t>LPF</a:t>
+            </a:r>
+          </a:p>
+          <a:p>
+            <a:pPr algn="ctr"/>
+            <a:r>
+              <a:rPr lang="en-US" altLang="zh-TW" dirty="0">
+                <a:solidFill>
+                  <a:schemeClr val="tx1"/>
+                </a:solidFill>
+              </a:rPr>
+              <a:t>(41.6 Hz)</a:t>
             </a:r>
             <a:endParaRPr lang="zh-TW" altLang="en-US" dirty="0">
               <a:solidFill>
@@ -4317,7 +3707,7 @@
         <p:spPr>
           <a:xfrm>
             <a:off x="2762539" y="4621818"/>
-            <a:ext cx="709324" cy="1034473"/>
+            <a:ext cx="954810" cy="1034473"/>
           </a:xfrm>
           <a:prstGeom prst="rect">
             <a:avLst/>
@@ -4354,6 +3744,17 @@
                 </a:solidFill>
               </a:rPr>
               <a:t>LPF</a:t>
+            </a:r>
+          </a:p>
+          <a:p>
+            <a:pPr algn="ctr"/>
+            <a:r>
+              <a:rPr lang="en-US" altLang="zh-TW" dirty="0">
+                <a:solidFill>
+                  <a:schemeClr val="tx1"/>
+                </a:solidFill>
+              </a:rPr>
+              <a:t>(100 Hz)</a:t>
             </a:r>
             <a:endParaRPr lang="zh-TW" altLang="en-US" dirty="0">
               <a:solidFill>
@@ -4841,10 +4242,1030 @@
           </a:fontRef>
         </p:style>
       </p:cxnSp>
+      <p:sp>
+        <p:nvSpPr>
+          <p:cNvPr id="11" name="文字方塊 10">
+            <a:extLst>
+              <a:ext uri="{FF2B5EF4-FFF2-40B4-BE49-F238E27FC236}">
+                <a16:creationId xmlns:a16="http://schemas.microsoft.com/office/drawing/2014/main" id="{206E53BD-AB44-811D-9BB7-051203D2A8F6}"/>
+              </a:ext>
+            </a:extLst>
+          </p:cNvPr>
+          <p:cNvSpPr txBox="1"/>
+          <p:nvPr/>
+        </p:nvSpPr>
+        <p:spPr>
+          <a:xfrm>
+            <a:off x="4126058" y="2835506"/>
+            <a:ext cx="966930" cy="369332"/>
+          </a:xfrm>
+          <a:prstGeom prst="rect">
+            <a:avLst/>
+          </a:prstGeom>
+          <a:noFill/>
+        </p:spPr>
+        <p:txBody>
+          <a:bodyPr wrap="square">
+            <a:spAutoFit/>
+          </a:bodyPr>
+          <a:lstStyle/>
+          <a:p>
+            <a:r>
+              <a:rPr lang="en-US" altLang="zh-TW" dirty="0">
+                <a:solidFill>
+                  <a:schemeClr val="tx1"/>
+                </a:solidFill>
+              </a:rPr>
+              <a:t>200 Hz</a:t>
+            </a:r>
+            <a:endParaRPr lang="zh-TW" altLang="en-US" dirty="0"/>
+          </a:p>
+        </p:txBody>
+      </p:sp>
     </p:spTree>
     <p:extLst>
       <p:ext uri="{BB962C8B-B14F-4D97-AF65-F5344CB8AC3E}">
         <p14:creationId xmlns:p14="http://schemas.microsoft.com/office/powerpoint/2010/main" val="2134387232"/>
+      </p:ext>
+    </p:extLst>
+  </p:cSld>
+  <p:clrMapOvr>
+    <a:masterClrMapping/>
+  </p:clrMapOvr>
+</p:sld>
+</file>
+
+<file path=ppt/slides/slide2.xml><?xml version="1.0" encoding="utf-8"?>
+<p:sld xmlns:a="http://schemas.openxmlformats.org/drawingml/2006/main" xmlns:r="http://schemas.openxmlformats.org/officeDocument/2006/relationships" xmlns:p="http://schemas.openxmlformats.org/presentationml/2006/main">
+  <p:cSld>
+    <p:spTree>
+      <p:nvGrpSpPr>
+        <p:cNvPr id="1" name=""/>
+        <p:cNvGrpSpPr/>
+        <p:nvPr/>
+      </p:nvGrpSpPr>
+      <p:grpSpPr>
+        <a:xfrm>
+          <a:off x="0" y="0"/>
+          <a:ext cx="0" cy="0"/>
+          <a:chOff x="0" y="0"/>
+          <a:chExt cx="0" cy="0"/>
+        </a:xfrm>
+      </p:grpSpPr>
+      <mc:AlternateContent xmlns:mc="http://schemas.openxmlformats.org/markup-compatibility/2006" xmlns:a14="http://schemas.microsoft.com/office/drawing/2010/main">
+        <mc:Choice Requires="a14">
+          <p:sp>
+            <p:nvSpPr>
+              <p:cNvPr id="6" name="文字方塊 5">
+                <a:extLst>
+                  <a:ext uri="{FF2B5EF4-FFF2-40B4-BE49-F238E27FC236}">
+                    <a16:creationId xmlns:a16="http://schemas.microsoft.com/office/drawing/2014/main" id="{570EF957-53AF-B014-8D21-6D96E194B52B}"/>
+                  </a:ext>
+                </a:extLst>
+              </p:cNvPr>
+              <p:cNvSpPr txBox="1"/>
+              <p:nvPr/>
+            </p:nvSpPr>
+            <p:spPr>
+              <a:xfrm>
+                <a:off x="1978839" y="1381538"/>
+                <a:ext cx="7466468" cy="852734"/>
+              </a:xfrm>
+              <a:prstGeom prst="rect">
+                <a:avLst/>
+              </a:prstGeom>
+              <a:noFill/>
+            </p:spPr>
+            <p:txBody>
+              <a:bodyPr wrap="none" lIns="0" tIns="0" rIns="0" bIns="0" rtlCol="0">
+                <a:spAutoFit/>
+              </a:bodyPr>
+              <a:lstStyle/>
+              <a:p>
+                <a:pPr/>
+                <a14:m>
+                  <m:oMathPara xmlns:m="http://schemas.openxmlformats.org/officeDocument/2006/math">
+                    <m:oMathParaPr>
+                      <m:jc m:val="centerGroup"/>
+                    </m:oMathParaPr>
+                    <m:oMath xmlns:m="http://schemas.openxmlformats.org/officeDocument/2006/math">
+                      <m:sSub>
+                        <m:sSubPr>
+                          <m:ctrlPr>
+                            <a:rPr lang="en-US" altLang="zh-TW" b="0" i="1" smtClean="0">
+                              <a:latin typeface="Cambria Math" panose="02040503050406030204" pitchFamily="18" charset="0"/>
+                            </a:rPr>
+                          </m:ctrlPr>
+                        </m:sSubPr>
+                        <m:e>
+                          <m:r>
+                            <a:rPr lang="en-US" altLang="zh-TW" b="0" i="1" smtClean="0">
+                              <a:latin typeface="Cambria Math" panose="02040503050406030204" pitchFamily="18" charset="0"/>
+                            </a:rPr>
+                            <m:t>𝑓</m:t>
+                          </m:r>
+                        </m:e>
+                        <m:sub>
+                          <m:r>
+                            <a:rPr lang="en-US" altLang="zh-TW" b="0" i="1" smtClean="0">
+                              <a:latin typeface="Cambria Math" panose="02040503050406030204" pitchFamily="18" charset="0"/>
+                            </a:rPr>
+                            <m:t>𝐶𝐹</m:t>
+                          </m:r>
+                        </m:sub>
+                      </m:sSub>
+                      <m:r>
+                        <a:rPr lang="en-US" altLang="zh-TW" b="0" i="1" smtClean="0">
+                          <a:latin typeface="Cambria Math" panose="02040503050406030204" pitchFamily="18" charset="0"/>
+                        </a:rPr>
+                        <m:t>=</m:t>
+                      </m:r>
+                      <m:f>
+                        <m:fPr>
+                          <m:ctrlPr>
+                            <a:rPr lang="en-US" altLang="zh-TW" b="0" i="1" smtClean="0">
+                              <a:latin typeface="Cambria Math" panose="02040503050406030204" pitchFamily="18" charset="0"/>
+                            </a:rPr>
+                          </m:ctrlPr>
+                        </m:fPr>
+                        <m:num>
+                          <m:r>
+                            <a:rPr lang="zh-TW" altLang="en-US" b="0" i="1" smtClean="0">
+                              <a:latin typeface="Cambria Math" panose="02040503050406030204" pitchFamily="18" charset="0"/>
+                            </a:rPr>
+                            <m:t>𝛼</m:t>
+                          </m:r>
+                          <m:sSub>
+                            <m:sSubPr>
+                              <m:ctrlPr>
+                                <a:rPr lang="en-US" altLang="zh-TW" b="0" i="1" smtClean="0">
+                                  <a:latin typeface="Cambria Math" panose="02040503050406030204" pitchFamily="18" charset="0"/>
+                                </a:rPr>
+                              </m:ctrlPr>
+                            </m:sSubPr>
+                            <m:e>
+                              <m:r>
+                                <a:rPr lang="en-US" altLang="zh-TW" b="0" i="1" smtClean="0">
+                                  <a:latin typeface="Cambria Math" panose="02040503050406030204" pitchFamily="18" charset="0"/>
+                                </a:rPr>
+                                <m:t>𝑓</m:t>
+                              </m:r>
+                            </m:e>
+                            <m:sub>
+                              <m:r>
+                                <a:rPr lang="en-US" altLang="zh-TW" b="0" i="1" smtClean="0">
+                                  <a:latin typeface="Cambria Math" panose="02040503050406030204" pitchFamily="18" charset="0"/>
+                                </a:rPr>
+                                <m:t>𝑠</m:t>
+                              </m:r>
+                            </m:sub>
+                          </m:sSub>
+                        </m:num>
+                        <m:den>
+                          <m:r>
+                            <a:rPr lang="en-US" altLang="zh-TW" b="0" i="1" smtClean="0">
+                              <a:latin typeface="Cambria Math" panose="02040503050406030204" pitchFamily="18" charset="0"/>
+                            </a:rPr>
+                            <m:t>2</m:t>
+                          </m:r>
+                          <m:r>
+                            <a:rPr lang="zh-TW" altLang="en-US" b="0" i="1" smtClean="0">
+                              <a:latin typeface="Cambria Math" panose="02040503050406030204" pitchFamily="18" charset="0"/>
+                            </a:rPr>
+                            <m:t>𝜋</m:t>
+                          </m:r>
+                          <m:r>
+                            <a:rPr lang="en-US" altLang="zh-TW" b="0" i="1" smtClean="0">
+                              <a:latin typeface="Cambria Math" panose="02040503050406030204" pitchFamily="18" charset="0"/>
+                            </a:rPr>
+                            <m:t>(1−</m:t>
+                          </m:r>
+                          <m:r>
+                            <a:rPr lang="zh-TW" altLang="en-US" b="0" i="1" smtClean="0">
+                              <a:latin typeface="Cambria Math" panose="02040503050406030204" pitchFamily="18" charset="0"/>
+                            </a:rPr>
+                            <m:t>𝛼</m:t>
+                          </m:r>
+                          <m:r>
+                            <a:rPr lang="en-US" altLang="zh-TW" b="0" i="1" smtClean="0">
+                              <a:latin typeface="Cambria Math" panose="02040503050406030204" pitchFamily="18" charset="0"/>
+                            </a:rPr>
+                            <m:t>)</m:t>
+                          </m:r>
+                        </m:den>
+                      </m:f>
+                      <m:r>
+                        <a:rPr lang="en-US" altLang="zh-TW" b="0" i="1" smtClean="0">
+                          <a:latin typeface="Cambria Math" panose="02040503050406030204" pitchFamily="18" charset="0"/>
+                        </a:rPr>
+                        <m:t>, </m:t>
+                      </m:r>
+                      <m:sSub>
+                        <m:sSubPr>
+                          <m:ctrlPr>
+                            <a:rPr lang="en-US" altLang="zh-TW" b="0" i="1" smtClean="0">
+                              <a:latin typeface="Cambria Math" panose="02040503050406030204" pitchFamily="18" charset="0"/>
+                            </a:rPr>
+                          </m:ctrlPr>
+                        </m:sSubPr>
+                        <m:e>
+                          <m:r>
+                            <a:rPr lang="en-US" altLang="zh-TW" b="0" i="1" smtClean="0">
+                              <a:latin typeface="Cambria Math" panose="02040503050406030204" pitchFamily="18" charset="0"/>
+                            </a:rPr>
+                            <m:t>𝑓</m:t>
+                          </m:r>
+                        </m:e>
+                        <m:sub>
+                          <m:r>
+                            <a:rPr lang="en-US" altLang="zh-TW" b="0" i="1" smtClean="0">
+                              <a:latin typeface="Cambria Math" panose="02040503050406030204" pitchFamily="18" charset="0"/>
+                            </a:rPr>
+                            <m:t>𝑠</m:t>
+                          </m:r>
+                        </m:sub>
+                      </m:sSub>
+                      <m:r>
+                        <a:rPr lang="en-US" altLang="zh-TW" b="0" i="1" smtClean="0">
+                          <a:latin typeface="Cambria Math" panose="02040503050406030204" pitchFamily="18" charset="0"/>
+                        </a:rPr>
+                        <m:t>:</m:t>
+                      </m:r>
+                      <m:r>
+                        <a:rPr lang="en-US" altLang="zh-TW" b="0" i="1" smtClean="0">
+                          <a:latin typeface="Cambria Math" panose="02040503050406030204" pitchFamily="18" charset="0"/>
+                        </a:rPr>
+                        <m:t>𝑠𝑎𝑚𝑝𝑙𝑖𝑛𝑔</m:t>
+                      </m:r>
+                      <m:r>
+                        <a:rPr lang="en-US" altLang="zh-TW" b="0" i="1" smtClean="0">
+                          <a:latin typeface="Cambria Math" panose="02040503050406030204" pitchFamily="18" charset="0"/>
+                        </a:rPr>
+                        <m:t> </m:t>
+                      </m:r>
+                      <m:r>
+                        <a:rPr lang="en-US" altLang="zh-TW" b="0" i="1" smtClean="0">
+                          <a:latin typeface="Cambria Math" panose="02040503050406030204" pitchFamily="18" charset="0"/>
+                        </a:rPr>
+                        <m:t>𝑟𝑎𝑡𝑒</m:t>
+                      </m:r>
+                      <m:r>
+                        <a:rPr lang="en-US" altLang="zh-TW" b="0" i="1" smtClean="0">
+                          <a:latin typeface="Cambria Math" panose="02040503050406030204" pitchFamily="18" charset="0"/>
+                        </a:rPr>
+                        <m:t>=</m:t>
+                      </m:r>
+                      <m:f>
+                        <m:fPr>
+                          <m:ctrlPr>
+                            <a:rPr lang="en-US" altLang="zh-TW" b="0" i="1" smtClean="0">
+                              <a:latin typeface="Cambria Math" panose="02040503050406030204" pitchFamily="18" charset="0"/>
+                            </a:rPr>
+                          </m:ctrlPr>
+                        </m:fPr>
+                        <m:num>
+                          <m:r>
+                            <a:rPr lang="en-US" altLang="zh-TW" b="0" i="1" smtClean="0">
+                              <a:latin typeface="Cambria Math" panose="02040503050406030204" pitchFamily="18" charset="0"/>
+                            </a:rPr>
+                            <m:t>1</m:t>
+                          </m:r>
+                        </m:num>
+                        <m:den>
+                          <m:r>
+                            <a:rPr lang="en-US" altLang="zh-TW" b="0" i="1" smtClean="0">
+                              <a:latin typeface="Cambria Math" panose="02040503050406030204" pitchFamily="18" charset="0"/>
+                            </a:rPr>
+                            <m:t>𝑑𝑎𝑡𝑎</m:t>
+                          </m:r>
+                          <m:r>
+                            <a:rPr lang="en-US" altLang="zh-TW" b="0" i="1" smtClean="0">
+                              <a:latin typeface="Cambria Math" panose="02040503050406030204" pitchFamily="18" charset="0"/>
+                            </a:rPr>
+                            <m:t> </m:t>
+                          </m:r>
+                          <m:r>
+                            <a:rPr lang="en-US" altLang="zh-TW" b="0" i="1" smtClean="0">
+                              <a:latin typeface="Cambria Math" panose="02040503050406030204" pitchFamily="18" charset="0"/>
+                            </a:rPr>
+                            <m:t>𝑟𝑎𝑡𝑒</m:t>
+                          </m:r>
+                        </m:den>
+                      </m:f>
+                      <m:r>
+                        <a:rPr lang="en-US" altLang="zh-TW" b="0" i="1" smtClean="0">
+                          <a:latin typeface="Cambria Math" panose="02040503050406030204" pitchFamily="18" charset="0"/>
+                        </a:rPr>
+                        <m:t>, </m:t>
+                      </m:r>
+                      <m:sSub>
+                        <m:sSubPr>
+                          <m:ctrlPr>
+                            <a:rPr lang="en-US" altLang="zh-TW" b="0" i="1" smtClean="0">
+                              <a:latin typeface="Cambria Math" panose="02040503050406030204" pitchFamily="18" charset="0"/>
+                            </a:rPr>
+                          </m:ctrlPr>
+                        </m:sSubPr>
+                        <m:e>
+                          <m:r>
+                            <a:rPr lang="en-US" altLang="zh-TW" b="0" i="1" smtClean="0">
+                              <a:latin typeface="Cambria Math" panose="02040503050406030204" pitchFamily="18" charset="0"/>
+                            </a:rPr>
+                            <m:t>𝑓</m:t>
+                          </m:r>
+                        </m:e>
+                        <m:sub>
+                          <m:r>
+                            <a:rPr lang="en-US" altLang="zh-TW" b="0" i="1" smtClean="0">
+                              <a:latin typeface="Cambria Math" panose="02040503050406030204" pitchFamily="18" charset="0"/>
+                            </a:rPr>
+                            <m:t>𝐶𝐹</m:t>
+                          </m:r>
+                        </m:sub>
+                      </m:sSub>
+                      <m:r>
+                        <a:rPr lang="en-US" altLang="zh-TW" b="0" i="1" smtClean="0">
+                          <a:latin typeface="Cambria Math" panose="02040503050406030204" pitchFamily="18" charset="0"/>
+                        </a:rPr>
+                        <m:t>=</m:t>
+                      </m:r>
+                      <m:r>
+                        <a:rPr lang="en-US" altLang="zh-TW" b="0" i="1" smtClean="0">
+                          <a:latin typeface="Cambria Math" panose="02040503050406030204" pitchFamily="18" charset="0"/>
+                        </a:rPr>
+                        <m:t>𝑐𝑢𝑡𝑜𝑓𝑓</m:t>
+                      </m:r>
+                      <m:r>
+                        <a:rPr lang="en-US" altLang="zh-TW" b="0" i="1" smtClean="0">
+                          <a:latin typeface="Cambria Math" panose="02040503050406030204" pitchFamily="18" charset="0"/>
+                        </a:rPr>
+                        <m:t> </m:t>
+                      </m:r>
+                      <m:r>
+                        <a:rPr lang="en-US" altLang="zh-TW" b="0" i="1" smtClean="0">
+                          <a:latin typeface="Cambria Math" panose="02040503050406030204" pitchFamily="18" charset="0"/>
+                        </a:rPr>
+                        <m:t>𝑓𝑟𝑒𝑞𝑢𝑒𝑛𝑐𝑦</m:t>
+                      </m:r>
+                    </m:oMath>
+                  </m:oMathPara>
+                </a14:m>
+                <a:endParaRPr lang="en-US" altLang="zh-TW" dirty="0"/>
+              </a:p>
+              <a:p>
+                <a:endParaRPr lang="zh-TW" altLang="en-US" dirty="0"/>
+              </a:p>
+            </p:txBody>
+          </p:sp>
+        </mc:Choice>
+        <mc:Fallback xmlns="">
+          <p:sp>
+            <p:nvSpPr>
+              <p:cNvPr id="6" name="文字方塊 5">
+                <a:extLst>
+                  <a:ext uri="{FF2B5EF4-FFF2-40B4-BE49-F238E27FC236}">
+                    <a16:creationId xmlns:a16="http://schemas.microsoft.com/office/drawing/2014/main" id="{570EF957-53AF-B014-8D21-6D96E194B52B}"/>
+                  </a:ext>
+                </a:extLst>
+              </p:cNvPr>
+              <p:cNvSpPr txBox="1">
+                <a:spLocks noRot="1" noChangeAspect="1" noMove="1" noResize="1" noEditPoints="1" noAdjustHandles="1" noChangeArrowheads="1" noChangeShapeType="1" noTextEdit="1"/>
+              </p:cNvSpPr>
+              <p:nvPr/>
+            </p:nvSpPr>
+            <p:spPr>
+              <a:xfrm>
+                <a:off x="1978839" y="1381538"/>
+                <a:ext cx="7466468" cy="852734"/>
+              </a:xfrm>
+              <a:prstGeom prst="rect">
+                <a:avLst/>
+              </a:prstGeom>
+              <a:blipFill>
+                <a:blip r:embed="rId2"/>
+                <a:stretch>
+                  <a:fillRect/>
+                </a:stretch>
+              </a:blipFill>
+            </p:spPr>
+            <p:txBody>
+              <a:bodyPr/>
+              <a:lstStyle/>
+              <a:p>
+                <a:r>
+                  <a:rPr lang="zh-TW" altLang="en-US">
+                    <a:noFill/>
+                  </a:rPr>
+                  <a:t> </a:t>
+                </a:r>
+              </a:p>
+            </p:txBody>
+          </p:sp>
+        </mc:Fallback>
+      </mc:AlternateContent>
+      <mc:AlternateContent xmlns:mc="http://schemas.openxmlformats.org/markup-compatibility/2006" xmlns:a14="http://schemas.microsoft.com/office/drawing/2010/main">
+        <mc:Choice Requires="a14">
+          <p:sp>
+            <p:nvSpPr>
+              <p:cNvPr id="7" name="文字方塊 6">
+                <a:extLst>
+                  <a:ext uri="{FF2B5EF4-FFF2-40B4-BE49-F238E27FC236}">
+                    <a16:creationId xmlns:a16="http://schemas.microsoft.com/office/drawing/2014/main" id="{4C653938-2FE4-9DAA-9D89-685E92E37168}"/>
+                  </a:ext>
+                </a:extLst>
+              </p:cNvPr>
+              <p:cNvSpPr txBox="1"/>
+              <p:nvPr/>
+            </p:nvSpPr>
+            <p:spPr>
+              <a:xfrm>
+                <a:off x="1885876" y="2426153"/>
+                <a:ext cx="1995354" cy="853760"/>
+              </a:xfrm>
+              <a:prstGeom prst="rect">
+                <a:avLst/>
+              </a:prstGeom>
+              <a:noFill/>
+            </p:spPr>
+            <p:txBody>
+              <a:bodyPr wrap="none" lIns="0" tIns="0" rIns="0" bIns="0" rtlCol="0">
+                <a:spAutoFit/>
+              </a:bodyPr>
+              <a:lstStyle/>
+              <a:p>
+                <a:pPr/>
+                <a14:m>
+                  <m:oMathPara xmlns:m="http://schemas.openxmlformats.org/officeDocument/2006/math">
+                    <m:oMathParaPr>
+                      <m:jc m:val="centerGroup"/>
+                    </m:oMathParaPr>
+                    <m:oMath xmlns:m="http://schemas.openxmlformats.org/officeDocument/2006/math">
+                      <m:r>
+                        <a:rPr lang="zh-TW" altLang="en-US" i="1" smtClean="0">
+                          <a:latin typeface="Cambria Math" panose="02040503050406030204" pitchFamily="18" charset="0"/>
+                        </a:rPr>
+                        <m:t>𝛼</m:t>
+                      </m:r>
+                      <m:r>
+                        <a:rPr lang="en-US" altLang="zh-TW" b="0" i="1" smtClean="0">
+                          <a:latin typeface="Cambria Math" panose="02040503050406030204" pitchFamily="18" charset="0"/>
+                        </a:rPr>
+                        <m:t>=</m:t>
+                      </m:r>
+                      <m:f>
+                        <m:fPr>
+                          <m:ctrlPr>
+                            <a:rPr lang="en-US" altLang="zh-TW" b="0" i="1" smtClean="0">
+                              <a:latin typeface="Cambria Math" panose="02040503050406030204" pitchFamily="18" charset="0"/>
+                            </a:rPr>
+                          </m:ctrlPr>
+                        </m:fPr>
+                        <m:num>
+                          <m:r>
+                            <a:rPr lang="en-US" altLang="zh-TW" b="0" i="1" smtClean="0">
+                              <a:latin typeface="Cambria Math" panose="02040503050406030204" pitchFamily="18" charset="0"/>
+                            </a:rPr>
+                            <m:t>2</m:t>
+                          </m:r>
+                          <m:r>
+                            <a:rPr lang="zh-TW" altLang="en-US" b="0" i="1" smtClean="0">
+                              <a:latin typeface="Cambria Math" panose="02040503050406030204" pitchFamily="18" charset="0"/>
+                            </a:rPr>
+                            <m:t>𝜋</m:t>
+                          </m:r>
+                          <m:sSub>
+                            <m:sSubPr>
+                              <m:ctrlPr>
+                                <a:rPr lang="en-US" altLang="zh-TW" b="0" i="1" smtClean="0">
+                                  <a:latin typeface="Cambria Math" panose="02040503050406030204" pitchFamily="18" charset="0"/>
+                                </a:rPr>
+                              </m:ctrlPr>
+                            </m:sSubPr>
+                            <m:e>
+                              <m:r>
+                                <a:rPr lang="en-US" altLang="zh-TW" b="0" i="1" smtClean="0">
+                                  <a:latin typeface="Cambria Math" panose="02040503050406030204" pitchFamily="18" charset="0"/>
+                                </a:rPr>
+                                <m:t>(</m:t>
+                              </m:r>
+                              <m:r>
+                                <a:rPr lang="en-US" altLang="zh-TW" b="0" i="1" smtClean="0">
+                                  <a:latin typeface="Cambria Math" panose="02040503050406030204" pitchFamily="18" charset="0"/>
+                                </a:rPr>
+                                <m:t>𝑓</m:t>
+                              </m:r>
+                            </m:e>
+                            <m:sub>
+                              <m:r>
+                                <a:rPr lang="en-US" altLang="zh-TW" b="0" i="1" smtClean="0">
+                                  <a:latin typeface="Cambria Math" panose="02040503050406030204" pitchFamily="18" charset="0"/>
+                                </a:rPr>
+                                <m:t>𝐶𝐹</m:t>
+                              </m:r>
+                            </m:sub>
+                          </m:sSub>
+                          <m:r>
+                            <a:rPr lang="en-US" altLang="zh-TW" b="0" i="1" smtClean="0">
+                              <a:latin typeface="Cambria Math" panose="02040503050406030204" pitchFamily="18" charset="0"/>
+                            </a:rPr>
+                            <m:t>/</m:t>
+                          </m:r>
+                          <m:sSub>
+                            <m:sSubPr>
+                              <m:ctrlPr>
+                                <a:rPr lang="en-US" altLang="zh-TW" b="0" i="1" smtClean="0">
+                                  <a:latin typeface="Cambria Math" panose="02040503050406030204" pitchFamily="18" charset="0"/>
+                                </a:rPr>
+                              </m:ctrlPr>
+                            </m:sSubPr>
+                            <m:e>
+                              <m:r>
+                                <a:rPr lang="en-US" altLang="zh-TW" b="0" i="1" smtClean="0">
+                                  <a:latin typeface="Cambria Math" panose="02040503050406030204" pitchFamily="18" charset="0"/>
+                                </a:rPr>
+                                <m:t>𝑓</m:t>
+                              </m:r>
+                            </m:e>
+                            <m:sub>
+                              <m:r>
+                                <a:rPr lang="en-US" altLang="zh-TW" b="0" i="1" smtClean="0">
+                                  <a:latin typeface="Cambria Math" panose="02040503050406030204" pitchFamily="18" charset="0"/>
+                                </a:rPr>
+                                <m:t>𝑠</m:t>
+                              </m:r>
+                            </m:sub>
+                          </m:sSub>
+                          <m:r>
+                            <a:rPr lang="en-US" altLang="zh-TW" b="0" i="1" smtClean="0">
+                              <a:latin typeface="Cambria Math" panose="02040503050406030204" pitchFamily="18" charset="0"/>
+                            </a:rPr>
+                            <m:t>)</m:t>
+                          </m:r>
+                        </m:num>
+                        <m:den>
+                          <m:r>
+                            <a:rPr lang="en-US" altLang="zh-TW" b="0" i="1" smtClean="0">
+                              <a:latin typeface="Cambria Math" panose="02040503050406030204" pitchFamily="18" charset="0"/>
+                            </a:rPr>
+                            <m:t>1+2</m:t>
+                          </m:r>
+                          <m:r>
+                            <a:rPr lang="zh-TW" altLang="en-US" b="0" i="1" smtClean="0">
+                              <a:latin typeface="Cambria Math" panose="02040503050406030204" pitchFamily="18" charset="0"/>
+                            </a:rPr>
+                            <m:t>𝜋</m:t>
+                          </m:r>
+                          <m:sSub>
+                            <m:sSubPr>
+                              <m:ctrlPr>
+                                <a:rPr lang="en-US" altLang="zh-TW" i="1">
+                                  <a:latin typeface="Cambria Math" panose="02040503050406030204" pitchFamily="18" charset="0"/>
+                                </a:rPr>
+                              </m:ctrlPr>
+                            </m:sSubPr>
+                            <m:e>
+                              <m:r>
+                                <a:rPr lang="en-US" altLang="zh-TW" i="1">
+                                  <a:latin typeface="Cambria Math" panose="02040503050406030204" pitchFamily="18" charset="0"/>
+                                </a:rPr>
+                                <m:t>(</m:t>
+                              </m:r>
+                              <m:r>
+                                <a:rPr lang="en-US" altLang="zh-TW" i="1">
+                                  <a:latin typeface="Cambria Math" panose="02040503050406030204" pitchFamily="18" charset="0"/>
+                                </a:rPr>
+                                <m:t>𝑓</m:t>
+                              </m:r>
+                            </m:e>
+                            <m:sub>
+                              <m:r>
+                                <a:rPr lang="en-US" altLang="zh-TW" i="1">
+                                  <a:latin typeface="Cambria Math" panose="02040503050406030204" pitchFamily="18" charset="0"/>
+                                </a:rPr>
+                                <m:t>𝐶𝐹</m:t>
+                              </m:r>
+                            </m:sub>
+                          </m:sSub>
+                          <m:r>
+                            <a:rPr lang="en-US" altLang="zh-TW" i="1">
+                              <a:latin typeface="Cambria Math" panose="02040503050406030204" pitchFamily="18" charset="0"/>
+                            </a:rPr>
+                            <m:t>/</m:t>
+                          </m:r>
+                          <m:sSub>
+                            <m:sSubPr>
+                              <m:ctrlPr>
+                                <a:rPr lang="en-US" altLang="zh-TW" i="1">
+                                  <a:latin typeface="Cambria Math" panose="02040503050406030204" pitchFamily="18" charset="0"/>
+                                </a:rPr>
+                              </m:ctrlPr>
+                            </m:sSubPr>
+                            <m:e>
+                              <m:r>
+                                <a:rPr lang="en-US" altLang="zh-TW" i="1">
+                                  <a:latin typeface="Cambria Math" panose="02040503050406030204" pitchFamily="18" charset="0"/>
+                                </a:rPr>
+                                <m:t>𝑓</m:t>
+                              </m:r>
+                            </m:e>
+                            <m:sub>
+                              <m:r>
+                                <a:rPr lang="en-US" altLang="zh-TW" i="1">
+                                  <a:latin typeface="Cambria Math" panose="02040503050406030204" pitchFamily="18" charset="0"/>
+                                </a:rPr>
+                                <m:t>𝑠</m:t>
+                              </m:r>
+                            </m:sub>
+                          </m:sSub>
+                          <m:r>
+                            <a:rPr lang="en-US" altLang="zh-TW" i="1">
+                              <a:latin typeface="Cambria Math" panose="02040503050406030204" pitchFamily="18" charset="0"/>
+                            </a:rPr>
+                            <m:t>)</m:t>
+                          </m:r>
+                        </m:den>
+                      </m:f>
+                    </m:oMath>
+                  </m:oMathPara>
+                </a14:m>
+                <a:endParaRPr lang="en-US" altLang="zh-TW" dirty="0"/>
+              </a:p>
+              <a:p>
+                <a:endParaRPr lang="zh-TW" altLang="en-US" dirty="0"/>
+              </a:p>
+            </p:txBody>
+          </p:sp>
+        </mc:Choice>
+        <mc:Fallback xmlns="">
+          <p:sp>
+            <p:nvSpPr>
+              <p:cNvPr id="7" name="文字方塊 6">
+                <a:extLst>
+                  <a:ext uri="{FF2B5EF4-FFF2-40B4-BE49-F238E27FC236}">
+                    <a16:creationId xmlns:a16="http://schemas.microsoft.com/office/drawing/2014/main" id="{4C653938-2FE4-9DAA-9D89-685E92E37168}"/>
+                  </a:ext>
+                </a:extLst>
+              </p:cNvPr>
+              <p:cNvSpPr txBox="1">
+                <a:spLocks noRot="1" noChangeAspect="1" noMove="1" noResize="1" noEditPoints="1" noAdjustHandles="1" noChangeArrowheads="1" noChangeShapeType="1" noTextEdit="1"/>
+              </p:cNvSpPr>
+              <p:nvPr/>
+            </p:nvSpPr>
+            <p:spPr>
+              <a:xfrm>
+                <a:off x="1885876" y="2426153"/>
+                <a:ext cx="1995354" cy="853760"/>
+              </a:xfrm>
+              <a:prstGeom prst="rect">
+                <a:avLst/>
+              </a:prstGeom>
+              <a:blipFill>
+                <a:blip r:embed="rId3"/>
+                <a:stretch>
+                  <a:fillRect/>
+                </a:stretch>
+              </a:blipFill>
+            </p:spPr>
+            <p:txBody>
+              <a:bodyPr/>
+              <a:lstStyle/>
+              <a:p>
+                <a:r>
+                  <a:rPr lang="zh-TW" altLang="en-US">
+                    <a:noFill/>
+                  </a:rPr>
+                  <a:t> </a:t>
+                </a:r>
+              </a:p>
+            </p:txBody>
+          </p:sp>
+        </mc:Fallback>
+      </mc:AlternateContent>
+      <p:graphicFrame>
+        <p:nvGraphicFramePr>
+          <p:cNvPr id="8" name="表格 7">
+            <a:extLst>
+              <a:ext uri="{FF2B5EF4-FFF2-40B4-BE49-F238E27FC236}">
+                <a16:creationId xmlns:a16="http://schemas.microsoft.com/office/drawing/2014/main" id="{4023381D-F2B6-3B41-2C9F-D80CE8F1E950}"/>
+              </a:ext>
+            </a:extLst>
+          </p:cNvPr>
+          <p:cNvGraphicFramePr>
+            <a:graphicFrameLocks noGrp="1"/>
+          </p:cNvGraphicFramePr>
+          <p:nvPr>
+            <p:extLst>
+              <p:ext uri="{D42A27DB-BD31-4B8C-83A1-F6EECF244321}">
+                <p14:modId xmlns:p14="http://schemas.microsoft.com/office/powerpoint/2010/main" val="4155133699"/>
+              </p:ext>
+            </p:extLst>
+          </p:nvPr>
+        </p:nvGraphicFramePr>
+        <p:xfrm>
+          <a:off x="1813339" y="3429000"/>
+          <a:ext cx="5418666" cy="2595880"/>
+        </p:xfrm>
+        <a:graphic>
+          <a:graphicData uri="http://schemas.openxmlformats.org/drawingml/2006/table">
+            <a:tbl>
+              <a:tblPr firstRow="1" bandRow="1">
+                <a:tableStyleId>{5C22544A-7EE6-4342-B048-85BDC9FD1C3A}</a:tableStyleId>
+              </a:tblPr>
+              <a:tblGrid>
+                <a:gridCol w="2709333">
+                  <a:extLst>
+                    <a:ext uri="{9D8B030D-6E8A-4147-A177-3AD203B41FA5}">
+                      <a16:colId xmlns:a16="http://schemas.microsoft.com/office/drawing/2014/main" val="37831314"/>
+                    </a:ext>
+                  </a:extLst>
+                </a:gridCol>
+                <a:gridCol w="2709333">
+                  <a:extLst>
+                    <a:ext uri="{9D8B030D-6E8A-4147-A177-3AD203B41FA5}">
+                      <a16:colId xmlns:a16="http://schemas.microsoft.com/office/drawing/2014/main" val="581469396"/>
+                    </a:ext>
+                  </a:extLst>
+                </a:gridCol>
+              </a:tblGrid>
+              <a:tr h="370840">
+                <a:tc>
+                  <a:txBody>
+                    <a:bodyPr/>
+                    <a:lstStyle/>
+                    <a:p>
+                      <a:endParaRPr lang="zh-TW" altLang="en-US"/>
+                    </a:p>
+                  </a:txBody>
+                  <a:tcPr/>
+                </a:tc>
+                <a:tc>
+                  <a:txBody>
+                    <a:bodyPr/>
+                    <a:lstStyle/>
+                    <a:p>
+                      <a:r>
+                        <a:rPr lang="en-US" altLang="zh-TW" dirty="0"/>
+                        <a:t>DR = 200 Hz</a:t>
+                      </a:r>
+                      <a:endParaRPr lang="zh-TW" altLang="en-US" dirty="0"/>
+                    </a:p>
+                  </a:txBody>
+                  <a:tcPr/>
+                </a:tc>
+                <a:extLst>
+                  <a:ext uri="{0D108BD9-81ED-4DB2-BD59-A6C34878D82A}">
+                    <a16:rowId xmlns:a16="http://schemas.microsoft.com/office/drawing/2014/main" val="1621140780"/>
+                  </a:ext>
+                </a:extLst>
+              </a:tr>
+              <a:tr h="370840">
+                <a:tc>
+                  <a:txBody>
+                    <a:bodyPr/>
+                    <a:lstStyle/>
+                    <a:p>
+                      <a:r>
+                        <a:rPr lang="en-US" altLang="zh-TW" dirty="0"/>
+                        <a:t>BW (Hz): disable </a:t>
+                      </a:r>
+                      <a:endParaRPr lang="zh-TW" altLang="en-US" dirty="0"/>
+                    </a:p>
+                  </a:txBody>
+                  <a:tcPr/>
+                </a:tc>
+                <a:tc>
+                  <a:txBody>
+                    <a:bodyPr/>
+                    <a:lstStyle/>
+                    <a:p>
+                      <a:r>
+                        <a:rPr lang="en-US" altLang="zh-TW" dirty="0"/>
+                        <a:t>Alpha = 1</a:t>
+                      </a:r>
+                      <a:endParaRPr lang="zh-TW" altLang="en-US" dirty="0"/>
+                    </a:p>
+                  </a:txBody>
+                  <a:tcPr/>
+                </a:tc>
+                <a:extLst>
+                  <a:ext uri="{0D108BD9-81ED-4DB2-BD59-A6C34878D82A}">
+                    <a16:rowId xmlns:a16="http://schemas.microsoft.com/office/drawing/2014/main" val="3531608056"/>
+                  </a:ext>
+                </a:extLst>
+              </a:tr>
+              <a:tr h="370840">
+                <a:tc>
+                  <a:txBody>
+                    <a:bodyPr/>
+                    <a:lstStyle/>
+                    <a:p>
+                      <a:r>
+                        <a:rPr lang="en-US" altLang="zh-TW" dirty="0"/>
+                        <a:t>50</a:t>
+                      </a:r>
+                      <a:endParaRPr lang="zh-TW" altLang="en-US" dirty="0"/>
+                    </a:p>
+                  </a:txBody>
+                  <a:tcPr/>
+                </a:tc>
+                <a:tc>
+                  <a:txBody>
+                    <a:bodyPr/>
+                    <a:lstStyle/>
+                    <a:p>
+                      <a:r>
+                        <a:rPr lang="en-US" altLang="zh-TW" dirty="0"/>
+                        <a:t>0.611</a:t>
+                      </a:r>
+                      <a:endParaRPr lang="zh-TW" altLang="en-US" dirty="0"/>
+                    </a:p>
+                  </a:txBody>
+                  <a:tcPr/>
+                </a:tc>
+                <a:extLst>
+                  <a:ext uri="{0D108BD9-81ED-4DB2-BD59-A6C34878D82A}">
+                    <a16:rowId xmlns:a16="http://schemas.microsoft.com/office/drawing/2014/main" val="595383468"/>
+                  </a:ext>
+                </a:extLst>
+              </a:tr>
+              <a:tr h="370840">
+                <a:tc>
+                  <a:txBody>
+                    <a:bodyPr/>
+                    <a:lstStyle/>
+                    <a:p>
+                      <a:r>
+                        <a:rPr lang="en-US" altLang="zh-TW" dirty="0"/>
+                        <a:t>20</a:t>
+                      </a:r>
+                      <a:endParaRPr lang="zh-TW" altLang="en-US" dirty="0"/>
+                    </a:p>
+                  </a:txBody>
+                  <a:tcPr/>
+                </a:tc>
+                <a:tc>
+                  <a:txBody>
+                    <a:bodyPr/>
+                    <a:lstStyle/>
+                    <a:p>
+                      <a:r>
+                        <a:rPr lang="en-US" altLang="zh-TW" dirty="0"/>
+                        <a:t>0.386</a:t>
+                      </a:r>
+                      <a:endParaRPr lang="zh-TW" altLang="en-US" dirty="0"/>
+                    </a:p>
+                  </a:txBody>
+                  <a:tcPr/>
+                </a:tc>
+                <a:extLst>
+                  <a:ext uri="{0D108BD9-81ED-4DB2-BD59-A6C34878D82A}">
+                    <a16:rowId xmlns:a16="http://schemas.microsoft.com/office/drawing/2014/main" val="2846625576"/>
+                  </a:ext>
+                </a:extLst>
+              </a:tr>
+              <a:tr h="370840">
+                <a:tc>
+                  <a:txBody>
+                    <a:bodyPr/>
+                    <a:lstStyle/>
+                    <a:p>
+                      <a:r>
+                        <a:rPr lang="en-US" altLang="zh-TW" dirty="0"/>
+                        <a:t>10</a:t>
+                      </a:r>
+                      <a:endParaRPr lang="zh-TW" altLang="en-US" dirty="0"/>
+                    </a:p>
+                  </a:txBody>
+                  <a:tcPr/>
+                </a:tc>
+                <a:tc>
+                  <a:txBody>
+                    <a:bodyPr/>
+                    <a:lstStyle/>
+                    <a:p>
+                      <a:r>
+                        <a:rPr lang="en-US" altLang="zh-TW" dirty="0"/>
+                        <a:t>0.239</a:t>
+                      </a:r>
+                      <a:endParaRPr lang="zh-TW" altLang="en-US" dirty="0"/>
+                    </a:p>
+                  </a:txBody>
+                  <a:tcPr/>
+                </a:tc>
+                <a:extLst>
+                  <a:ext uri="{0D108BD9-81ED-4DB2-BD59-A6C34878D82A}">
+                    <a16:rowId xmlns:a16="http://schemas.microsoft.com/office/drawing/2014/main" val="2938971556"/>
+                  </a:ext>
+                </a:extLst>
+              </a:tr>
+              <a:tr h="370840">
+                <a:tc>
+                  <a:txBody>
+                    <a:bodyPr/>
+                    <a:lstStyle/>
+                    <a:p>
+                      <a:r>
+                        <a:rPr lang="en-US" altLang="zh-TW" dirty="0"/>
+                        <a:t>5</a:t>
+                      </a:r>
+                      <a:endParaRPr lang="zh-TW" altLang="en-US" dirty="0"/>
+                    </a:p>
+                  </a:txBody>
+                  <a:tcPr/>
+                </a:tc>
+                <a:tc>
+                  <a:txBody>
+                    <a:bodyPr/>
+                    <a:lstStyle/>
+                    <a:p>
+                      <a:r>
+                        <a:rPr lang="en-US" altLang="zh-TW" dirty="0"/>
+                        <a:t>0.136</a:t>
+                      </a:r>
+                      <a:endParaRPr lang="zh-TW" altLang="en-US" dirty="0"/>
+                    </a:p>
+                  </a:txBody>
+                  <a:tcPr/>
+                </a:tc>
+                <a:extLst>
+                  <a:ext uri="{0D108BD9-81ED-4DB2-BD59-A6C34878D82A}">
+                    <a16:rowId xmlns:a16="http://schemas.microsoft.com/office/drawing/2014/main" val="1509618998"/>
+                  </a:ext>
+                </a:extLst>
+              </a:tr>
+              <a:tr h="370840">
+                <a:tc>
+                  <a:txBody>
+                    <a:bodyPr/>
+                    <a:lstStyle/>
+                    <a:p>
+                      <a:r>
+                        <a:rPr lang="en-US" altLang="zh-TW" dirty="0"/>
+                        <a:t>1</a:t>
+                      </a:r>
+                      <a:endParaRPr lang="zh-TW" altLang="en-US" dirty="0"/>
+                    </a:p>
+                  </a:txBody>
+                  <a:tcPr/>
+                </a:tc>
+                <a:tc>
+                  <a:txBody>
+                    <a:bodyPr/>
+                    <a:lstStyle/>
+                    <a:p>
+                      <a:r>
+                        <a:rPr lang="en-US" altLang="zh-TW" dirty="0"/>
+                        <a:t>0.031</a:t>
+                      </a:r>
+                      <a:endParaRPr lang="zh-TW" altLang="en-US" dirty="0"/>
+                    </a:p>
+                  </a:txBody>
+                  <a:tcPr/>
+                </a:tc>
+                <a:extLst>
+                  <a:ext uri="{0D108BD9-81ED-4DB2-BD59-A6C34878D82A}">
+                    <a16:rowId xmlns:a16="http://schemas.microsoft.com/office/drawing/2014/main" val="1074408132"/>
+                  </a:ext>
+                </a:extLst>
+              </a:tr>
+            </a:tbl>
+          </a:graphicData>
+        </a:graphic>
+      </p:graphicFrame>
+      <p:pic>
+        <p:nvPicPr>
+          <p:cNvPr id="12" name="圖片 11">
+            <a:extLst>
+              <a:ext uri="{FF2B5EF4-FFF2-40B4-BE49-F238E27FC236}">
+                <a16:creationId xmlns:a16="http://schemas.microsoft.com/office/drawing/2014/main" id="{A274B487-FA64-4617-4524-42954F46CAA2}"/>
+              </a:ext>
+            </a:extLst>
+          </p:cNvPr>
+          <p:cNvPicPr>
+            <a:picLocks noChangeAspect="1"/>
+          </p:cNvPicPr>
+          <p:nvPr/>
+        </p:nvPicPr>
+        <p:blipFill>
+          <a:blip r:embed="rId4"/>
+          <a:stretch>
+            <a:fillRect/>
+          </a:stretch>
+        </p:blipFill>
+        <p:spPr>
+          <a:xfrm>
+            <a:off x="7805530" y="4338320"/>
+            <a:ext cx="4016972" cy="1138142"/>
+          </a:xfrm>
+          <a:prstGeom prst="rect">
+            <a:avLst/>
+          </a:prstGeom>
+        </p:spPr>
+      </p:pic>
+    </p:spTree>
+    <p:extLst>
+      <p:ext uri="{BB962C8B-B14F-4D97-AF65-F5344CB8AC3E}">
+        <p14:creationId xmlns:p14="http://schemas.microsoft.com/office/powerpoint/2010/main" val="659502924"/>
       </p:ext>
     </p:extLst>
   </p:cSld>
